--- a/Research/Phase 2/RP2_U23AI035/slides/RP2_U23AI035_slides.pptx
+++ b/Research/Phase 2/RP2_U23AI035/slides/RP2_U23AI035_slides.pptx
@@ -1260,7 +1260,7 @@
           </a:prstGeom>
           <a:extLst>
             <a:ext uri="{C572A759-6A51-4108-AA02-DFA0A04FC94B}">
-              <ma14:wrappingTextBoxFlag xmlns:ma14="http://schemas.microsoft.com/office/mac/drawingml/2011/main" xmlns="" val="0"/>
+              <ma14:wrappingTextBoxFlag xmlns="" xmlns:ma14="http://schemas.microsoft.com/office/mac/drawingml/2011/main" val="0"/>
             </a:ext>
           </a:extLst>
         </p:spPr>
@@ -1335,7 +1335,7 @@
           </a:prstGeom>
           <a:extLst>
             <a:ext uri="{C572A759-6A51-4108-AA02-DFA0A04FC94B}">
-              <ma14:wrappingTextBoxFlag xmlns:ma14="http://schemas.microsoft.com/office/mac/drawingml/2011/main" xmlns="" val="0"/>
+              <ma14:wrappingTextBoxFlag xmlns="" xmlns:ma14="http://schemas.microsoft.com/office/mac/drawingml/2011/main" val="0"/>
             </a:ext>
           </a:extLst>
         </p:spPr>
@@ -1789,7 +1789,7 @@
                 <a:ea typeface="Calibri" pitchFamily="34" charset="-122"/>
                 <a:cs typeface="Calibri" pitchFamily="34" charset="-120"/>
               </a:rPr>
-              <a:t>Name: Jaival Chauhan     Roll No.: U23AI035</a:t>
+              <a:t>Name: Jaival, Parth &amp; Vikram Roll No.: 35, 87 &amp; 34</a:t>
             </a:r>
             <a:endParaRPr lang="en-US" sz="1400" dirty="0"/>
           </a:p>
@@ -2338,7 +2338,7 @@
           </a:prstGeom>
           <a:extLst>
             <a:ext uri="{C572A759-6A51-4108-AA02-DFA0A04FC94B}">
-              <ma14:wrappingTextBoxFlag xmlns:ma14="http://schemas.microsoft.com/office/mac/drawingml/2011/main" xmlns="" val="0"/>
+              <ma14:wrappingTextBoxFlag xmlns="" xmlns:ma14="http://schemas.microsoft.com/office/mac/drawingml/2011/main" val="0"/>
             </a:ext>
           </a:extLst>
         </p:spPr>
@@ -3131,7 +3131,7 @@
           </a:prstGeom>
           <a:extLst>
             <a:ext uri="{C572A759-6A51-4108-AA02-DFA0A04FC94B}">
-              <ma14:wrappingTextBoxFlag xmlns:ma14="http://schemas.microsoft.com/office/mac/drawingml/2011/main" xmlns="" val="0"/>
+              <ma14:wrappingTextBoxFlag xmlns="" xmlns:ma14="http://schemas.microsoft.com/office/mac/drawingml/2011/main" val="0"/>
             </a:ext>
           </a:extLst>
         </p:spPr>
@@ -4074,7 +4074,7 @@
           </a:prstGeom>
           <a:extLst>
             <a:ext uri="{C572A759-6A51-4108-AA02-DFA0A04FC94B}">
-              <ma14:wrappingTextBoxFlag xmlns:ma14="http://schemas.microsoft.com/office/mac/drawingml/2011/main" xmlns="" val="0"/>
+              <ma14:wrappingTextBoxFlag xmlns="" xmlns:ma14="http://schemas.microsoft.com/office/mac/drawingml/2011/main" val="0"/>
             </a:ext>
           </a:extLst>
         </p:spPr>
@@ -4544,7 +4544,7 @@
           </a:prstGeom>
           <a:extLst>
             <a:ext uri="{C572A759-6A51-4108-AA02-DFA0A04FC94B}">
-              <ma14:wrappingTextBoxFlag xmlns:ma14="http://schemas.microsoft.com/office/mac/drawingml/2011/main" xmlns="" val="0"/>
+              <ma14:wrappingTextBoxFlag xmlns="" xmlns:ma14="http://schemas.microsoft.com/office/mac/drawingml/2011/main" val="0"/>
             </a:ext>
           </a:extLst>
         </p:spPr>
@@ -6327,7 +6327,7 @@
           </a:prstGeom>
           <a:extLst>
             <a:ext uri="{C572A759-6A51-4108-AA02-DFA0A04FC94B}">
-              <ma14:wrappingTextBoxFlag xmlns:ma14="http://schemas.microsoft.com/office/mac/drawingml/2011/main" xmlns="" val="0"/>
+              <ma14:wrappingTextBoxFlag xmlns="" xmlns:ma14="http://schemas.microsoft.com/office/mac/drawingml/2011/main" val="0"/>
             </a:ext>
           </a:extLst>
         </p:spPr>
@@ -6836,7 +6836,7 @@
           </a:prstGeom>
           <a:extLst>
             <a:ext uri="{C572A759-6A51-4108-AA02-DFA0A04FC94B}">
-              <ma14:wrappingTextBoxFlag xmlns:ma14="http://schemas.microsoft.com/office/mac/drawingml/2011/main" xmlns="" val="0"/>
+              <ma14:wrappingTextBoxFlag xmlns="" xmlns:ma14="http://schemas.microsoft.com/office/mac/drawingml/2011/main" val="0"/>
             </a:ext>
           </a:extLst>
         </p:spPr>
@@ -7765,7 +7765,7 @@
           </a:prstGeom>
           <a:extLst>
             <a:ext uri="{C572A759-6A51-4108-AA02-DFA0A04FC94B}">
-              <ma14:wrappingTextBoxFlag xmlns:ma14="http://schemas.microsoft.com/office/mac/drawingml/2011/main" xmlns="" val="0"/>
+              <ma14:wrappingTextBoxFlag xmlns="" xmlns:ma14="http://schemas.microsoft.com/office/mac/drawingml/2011/main" val="0"/>
             </a:ext>
           </a:extLst>
         </p:spPr>
@@ -8208,7 +8208,7 @@
           </a:prstGeom>
           <a:extLst>
             <a:ext uri="{C572A759-6A51-4108-AA02-DFA0A04FC94B}">
-              <ma14:wrappingTextBoxFlag xmlns:ma14="http://schemas.microsoft.com/office/mac/drawingml/2011/main" xmlns="" val="0"/>
+              <ma14:wrappingTextBoxFlag xmlns="" xmlns:ma14="http://schemas.microsoft.com/office/mac/drawingml/2011/main" val="0"/>
             </a:ext>
           </a:extLst>
         </p:spPr>
